--- a/docs/需求建模/2组-work/02-需求建模汇报PPT-2组版.pptx
+++ b/docs/需求建模/2组-work/02-需求建模汇报PPT-2组版.pptx
@@ -3250,7 +3250,7 @@
                 <a:ea typeface="微软雅黑"/>
                 <a:cs typeface="微软雅黑"/>
               </a:rPr>
-              <a:t>内置 AI 助手的文档阅读器　|　V0.3 修订版（中间汇报）</a:t>
+              <a:t>内置 AI 助手的文档阅读器　|　V0.3 修订版（交付稿）</a:t>
             </a:r>
           </a:p>
         </p:txBody>
@@ -3910,7 +3910,7 @@
                 <a:ea typeface="微软雅黑"/>
                 <a:cs typeface="微软雅黑"/>
               </a:rPr>
-              <a:t>WP-A 图形专项（廖欣豪）：状态图 / 时序图 / 活动图，共 8 张</a:t>
+              <a:t>WP-A 图形专项（廖欣豪）：状态图 / 时序图 / 活动图 / 界面导航图，共 11 张</a:t>
             </a:r>
           </a:p>
           <a:p>
@@ -5996,7 +5996,7 @@
                 <a:ea typeface="微软雅黑"/>
                 <a:cs typeface="微软雅黑"/>
               </a:rPr>
-              <a:t>廖欣豪｜补齐基线完全缺失的图，共 8 张</a:t>
+              <a:t>廖欣豪｜补齐基线完全缺失的图，共 11 张</a:t>
             </a:r>
           </a:p>
         </p:txBody>
@@ -6388,7 +6388,7 @@
                 <a:ea typeface="微软雅黑"/>
                 <a:cs typeface="微软雅黑"/>
               </a:rPr>
-              <a:t>时序图 ×3 与活动图 ×2</a:t>
+              <a:t>时序图 ×3、活动图 ×2 与界面导航图</a:t>
             </a:r>
           </a:p>
           <a:p>
@@ -6514,7 +6514,25 @@
                 <a:ea typeface="微软雅黑"/>
                 <a:cs typeface="微软雅黑"/>
               </a:rPr>
-              <a:t>验收：状态集合与 SPEC/模型文字完全一致，无自造状态；每张图在 CodeArts 建档出图</a:t>
+              <a:t>A9　界面导航图（9 个页面可达关系 + 门控控件落点，基线完全未做）</a:t>
+            </a:r>
+          </a:p>
+          <a:p>
+            <a:pPr>
+              <a:spcBef>
+                <a:spcPts val="600"/>
+              </a:spcBef>
+            </a:pPr>
+            <a:r>
+              <a:rPr sz="1350" b="0">
+                <a:solidFill>
+                  <a:srgbClr val="1F2937"/>
+                </a:solidFill>
+                <a:latin typeface="微软雅黑"/>
+                <a:ea typeface="微软雅黑"/>
+                <a:cs typeface="微软雅黑"/>
+              </a:rPr>
+              <a:t>验收：状态集合与 SPEC/模型文字完全一致，无自造状态；图件已定稿，随交付包提交</a:t>
             </a:r>
           </a:p>
         </p:txBody>
@@ -6656,7 +6674,7 @@
                 <a:ea typeface="微软雅黑"/>
                 <a:cs typeface="微软雅黑"/>
               </a:rPr>
-              <a:t>文档、界面、访谈三条线并行的补充计划</a:t>
+              <a:t>文档、界面、访谈三条线的补充计划与进展</a:t>
             </a:r>
           </a:p>
         </p:txBody>
@@ -6906,7 +6924,7 @@
                 <a:ea typeface="微软雅黑"/>
                 <a:cs typeface="微软雅黑"/>
               </a:rPr>
-              <a:t>WP-C：伪前端 8 个页面（library / search / notes / summary / settings / export …）</a:t>
+              <a:t>WP-C：伪前端 9 个页面（library / search / notes / summary / settings / export / answer-more …）</a:t>
             </a:r>
           </a:p>
           <a:p>
@@ -7334,7 +7352,7 @@
                 <a:ea typeface="微软雅黑"/>
                 <a:cs typeface="微软雅黑"/>
               </a:rPr>
-              <a:t>本轮完成 WP1 与 WP6，图形与文档专项随后回流归并</a:t>
+              <a:t>本轮完成模型修订、图形定稿与文档侧全部收口，随 V0.3 交付包一并提交</a:t>
             </a:r>
           </a:p>
         </p:txBody>
@@ -7566,7 +7584,7 @@
                 <a:ea typeface="微软雅黑"/>
                 <a:cs typeface="微软雅黑"/>
               </a:rPr>
-              <a:t>WP6：2 组版汇报 PPT（本文件，中间版）</a:t>
+              <a:t>WP6：2 组版汇报 PPT（本文件，交付稿）</a:t>
             </a:r>
           </a:p>
           <a:p>
@@ -7602,7 +7620,25 @@
                 <a:ea typeface="微软雅黑"/>
                 <a:cs typeface="微软雅黑"/>
               </a:rPr>
-              <a:t>提交方式：分支 2zu/gq/wp1-model-revision，走 PR 合并，不直接推送 main</a:t>
+              <a:t>图形定稿：11 张图底稿 + 渲染导出图（状态图 / 时序图 / 活动图 / 界面导航图 + 2 张修订件）</a:t>
+            </a:r>
+          </a:p>
+          <a:p>
+            <a:pPr>
+              <a:spcBef>
+                <a:spcPts val="600"/>
+              </a:spcBef>
+            </a:pPr>
+            <a:r>
+              <a:rPr sz="1350" b="0">
+                <a:solidFill>
+                  <a:srgbClr val="1F2937"/>
+                </a:solidFill>
+                <a:latin typeface="微软雅黑"/>
+                <a:ea typeface="微软雅黑"/>
+                <a:cs typeface="微软雅黑"/>
+              </a:rPr>
+              <a:t>文档收口：评审入口 9 问回答、UC01–UC12 完整用例规约、编号口径全库校对、SRS V1.1 返修清单、R-02 裁决材料</a:t>
             </a:r>
           </a:p>
         </p:txBody>
@@ -7762,43 +7798,43 @@
                 <a:ea typeface="微软雅黑"/>
                 <a:cs typeface="微软雅黑"/>
               </a:rPr>
-              <a:t>② WP-A / WP-B / WP-C / WP-D 产出回流</a:t>
-            </a:r>
-          </a:p>
-          <a:p>
-            <a:pPr>
-              <a:spcBef>
-                <a:spcPts val="600"/>
-              </a:spcBef>
-            </a:pPr>
-            <a:r>
-              <a:rPr sz="1350" b="0">
-                <a:solidFill>
-                  <a:srgbClr val="1F2937"/>
-                </a:solidFill>
-                <a:latin typeface="微软雅黑"/>
-                <a:ea typeface="微软雅黑"/>
-                <a:cs typeface="微软雅黑"/>
-              </a:rPr>
-              <a:t>③ 归并为完整 V0.4 模型包</a:t>
-            </a:r>
-          </a:p>
-          <a:p>
-            <a:pPr>
-              <a:spcBef>
-                <a:spcPts val="600"/>
-              </a:spcBef>
-            </a:pPr>
-            <a:r>
-              <a:rPr sz="1350" b="0">
-                <a:solidFill>
-                  <a:srgbClr val="1F2937"/>
-                </a:solidFill>
-                <a:latin typeface="微软雅黑"/>
-                <a:ea typeface="微软雅黑"/>
-                <a:cs typeface="微软雅黑"/>
-              </a:rPr>
-              <a:t>④ 导入华为 CodeArts Modeling 正式建档出图（课程强制）</a:t>
+              <a:t>② 由 1 组补齐 SRS / SPEC 的 Word 正文（返修清单已交）</a:t>
+            </a:r>
+          </a:p>
+          <a:p>
+            <a:pPr>
+              <a:spcBef>
+                <a:spcPts val="600"/>
+              </a:spcBef>
+            </a:pPr>
+            <a:r>
+              <a:rPr sz="1350" b="0">
+                <a:solidFill>
+                  <a:srgbClr val="1F2937"/>
+                </a:solidFill>
+                <a:latin typeface="微软雅黑"/>
+                <a:ea typeface="微软雅黑"/>
+                <a:cs typeface="微软雅黑"/>
+              </a:rPr>
+              <a:t>③ 两组合并为团队终稿，由班级统一提交</a:t>
+            </a:r>
+          </a:p>
+          <a:p>
+            <a:pPr>
+              <a:spcBef>
+                <a:spcPts val="600"/>
+              </a:spcBef>
+            </a:pPr>
+            <a:r>
+              <a:rPr sz="1350" b="0">
+                <a:solidFill>
+                  <a:srgbClr val="1F2937"/>
+                </a:solidFill>
+                <a:latin typeface="微软雅黑"/>
+                <a:ea typeface="微软雅黑"/>
+                <a:cs typeface="微软雅黑"/>
+              </a:rPr>
+              <a:t>④ 向任课教师确认本队选题的用例覆盖口径</a:t>
             </a:r>
           </a:p>
           <a:p>
